--- a/skills/presentations/assets/pptx/examples/09-period-end-review.pptx
+++ b/skills/presentations/assets/pptx/examples/09-period-end-review.pptx
@@ -5,16 +5,16 @@
     <p:sldMasterId xmlns:r="http://schemas.openxmlformats.org/officeDocument/2006/relationships" id="2147483648" r:id="rId1"/>
   </p:sldMasterIdLst>
   <p:notesMasterIdLst>
-    <p:notesMasterId r:id="R4429e6d4e9aa450d"/>
+    <p:notesMasterId r:id="R94d0f3664e084857"/>
   </p:notesMasterIdLst>
   <p:sldIdLst>
-    <p:sldId id="256" r:id="R6ee44c0aa9ca4225"/>
-    <p:sldId id="257" r:id="Ra0c4340f0d724e19"/>
-    <p:sldId id="258" r:id="R87bb0f964c394f9c"/>
-    <p:sldId id="259" r:id="Rbe02486132e84393"/>
-    <p:sldId id="260" r:id="R35c04edd0dd14a36"/>
-    <p:sldId id="261" r:id="Rcf85942cb9e14bdb"/>
-    <p:sldId id="262" r:id="R8351c8ba9eb24e2a"/>
+    <p:sldId id="256" r:id="Rede03627048742a5"/>
+    <p:sldId id="257" r:id="Rd71d2a84a8e34d24"/>
+    <p:sldId id="258" r:id="Rb5423f07a63d473d"/>
+    <p:sldId id="259" r:id="R6e9d3db1e2c54f7f"/>
+    <p:sldId id="260" r:id="R13b4bcec534041f1"/>
+    <p:sldId id="261" r:id="Rcb5cfab05a2244ab"/>
+    <p:sldId id="262" r:id="Rb49f91fdc6d74e77"/>
   </p:sldIdLst>
   <p:sldSz cx="12192000" cy="6858000"/>
   <p:notesSz cx="6858000" cy="9144000"/>
@@ -1371,7 +1371,7 @@
                 <a:latin typeface="Calibri"/>
                 <a:ea typeface="Calibri"/>
               </a:rPr>
-              <a:t>Overall: GREEN  ·  Wins: freeze path, day-3 boot, farm ROI  ·  Carry: IO single-thread  ·  Ask: endorse Q3 B + HC</a:t>
+              <a:t>Overall: GREEN  ·  Wins: freeze 4/10, day-3 boot 5/15, farm ROI  ·  Carry: IO single-thread  ·  Ask: Q3 B + HC</a:t>
             </a:r>
           </a:p>
         </p:txBody>
@@ -1406,7 +1406,7 @@
                 <a:latin typeface="Calibri"/>
                 <a:ea typeface="Calibri"/>
               </a:rPr>
-              <a:t>Achieved: AON freeze decision B; first silicon day-3 boot; DV farm value case.</a:t>
+              <a:t>Q2 lookback (QBR ~2026-06-26): AON Option B (3/20); RTL freeze 4/10; TO 4/28; day-3 boot 5/15; sample plan on track 6/30.</a:t>
             </a:r>
           </a:p>
           <a:p xmlns:a="http://schemas.openxmlformats.org/drawingml/2006/main">
@@ -1418,7 +1418,7 @@
                 <a:latin typeface="Calibri"/>
                 <a:ea typeface="Calibri"/>
               </a:rPr>
-              <a:t>Miss/partial: USB3 complete (to 6/10) — capacity unplanned 20%.</a:t>
+              <a:t>Miss/partial: USB3 complete (to 6/10) — capacity unplanned ~20%.</a:t>
             </a:r>
           </a:p>
           <a:p xmlns:a="http://schemas.openxmlformats.org/drawingml/2006/main">
@@ -1430,7 +1430,7 @@
                 <a:latin typeface="Calibri"/>
                 <a:ea typeface="Calibri"/>
               </a:rPr>
-              <a:t>Next: endorse Q3 balanced plan + senior DV req.</a:t>
+              <a:t>Next: endorse Q3 balanced plan + senior DV req (opened 5/22).</a:t>
             </a:r>
           </a:p>
         </p:txBody>
@@ -1551,7 +1551,7 @@
                 <a:latin typeface="Calibri"/>
                 <a:ea typeface="Calibri"/>
               </a:rPr>
-              <a:t>AON freeze-ready decision — Hit — B approved 5/16</a:t>
+              <a:t>AON freeze-ready decision — Hit — B approved 3/20</a:t>
             </a:r>
           </a:p>
           <a:p xmlns:a="http://schemas.openxmlformats.org/drawingml/2006/main">
@@ -1563,7 +1563,19 @@
                 <a:latin typeface="Calibri"/>
                 <a:ea typeface="Calibri"/>
               </a:rPr>
-              <a:t>Day-5 boot — Hit — day 3 actual</a:t>
+              <a:t>RTL freeze 4/10 — Hit</a:t>
+            </a:r>
+          </a:p>
+          <a:p xmlns:a="http://schemas.openxmlformats.org/drawingml/2006/main">
+            <a:r>
+              <a:rPr lang="en-US" sz="1600" b="0">
+                <a:solidFill>
+                  <a:srgbClr val="1A202C"/>
+                </a:solidFill>
+                <a:latin typeface="Calibri"/>
+                <a:ea typeface="Calibri"/>
+              </a:rPr>
+              <a:t>Day-5 boot — Hit — day 3 actual (silicon 5/12)</a:t>
             </a:r>
           </a:p>
           <a:p xmlns:a="http://schemas.openxmlformats.org/drawingml/2006/main">
@@ -2539,7 +2551,7 @@
                 <a:latin typeface="Calibri"/>
                 <a:ea typeface="Calibri"/>
               </a:rPr>
-              <a:t>Decisions by: this QBR + follow-up 1:1 5/20.</a:t>
+              <a:t>Decisions by: this QBR (~6/26) + follow-up 1:1 into Q3 kickoff 7/01.</a:t>
             </a:r>
           </a:p>
         </p:txBody>

--- a/skills/presentations/assets/pptx/examples/09-period-end-review.pptx
+++ b/skills/presentations/assets/pptx/examples/09-period-end-review.pptx
@@ -5,16 +5,17 @@
     <p:sldMasterId xmlns:r="http://schemas.openxmlformats.org/officeDocument/2006/relationships" id="2147483648" r:id="rId1"/>
   </p:sldMasterIdLst>
   <p:notesMasterIdLst>
-    <p:notesMasterId r:id="R94d0f3664e084857"/>
+    <p:notesMasterId r:id="Rce31edac39a84d13"/>
   </p:notesMasterIdLst>
   <p:sldIdLst>
-    <p:sldId id="256" r:id="Rede03627048742a5"/>
-    <p:sldId id="257" r:id="Rd71d2a84a8e34d24"/>
-    <p:sldId id="258" r:id="Rb5423f07a63d473d"/>
-    <p:sldId id="259" r:id="R6e9d3db1e2c54f7f"/>
-    <p:sldId id="260" r:id="R13b4bcec534041f1"/>
-    <p:sldId id="261" r:id="Rcb5cfab05a2244ab"/>
-    <p:sldId id="262" r:id="Rb49f91fdc6d74e77"/>
+    <p:sldId id="256" r:id="Rd74d0cd4f6f14658"/>
+    <p:sldId id="257" r:id="R1990185f09a640c8"/>
+    <p:sldId id="258" r:id="Re62a985edb064ed4"/>
+    <p:sldId id="259" r:id="Rfa207d740c9f40c4"/>
+    <p:sldId id="260" r:id="Rd0d2bcaa34b14246"/>
+    <p:sldId id="261" r:id="R359ef0c2f448436c"/>
+    <p:sldId id="262" r:id="Rbccf80a58a364dc9"/>
+    <p:sldId id="263" r:id="R8371f753cf90418d"/>
   </p:sldIdLst>
   <p:sldSz cx="12192000" cy="6858000"/>
   <p:notesSz cx="6858000" cy="9144000"/>
@@ -480,6 +481,30 @@
               <a:t>Cover (example). Q2 green overall; carry people risk; ask Q3 plan + HC.</a:t>
             </a:r>
           </a:p>
+          <a:p xmlns:a="http://schemas.openxmlformats.org/drawingml/2006/main">
+            <a:r>
+              <a:rPr lang="en-US"/>
+              <a:t/>
+            </a:r>
+          </a:p>
+          <a:p xmlns:a="http://schemas.openxmlformats.org/drawingml/2006/main">
+            <a:r>
+              <a:rPr lang="en-US"/>
+              <a:t>Leadership QBR scorecard → risks → asks</a:t>
+            </a:r>
+          </a:p>
+          <a:p xmlns:a="http://schemas.openxmlformats.org/drawingml/2006/main">
+            <a:r>
+              <a:rPr lang="en-US"/>
+              <a:t>SRE Book — example postmortem (impact honesty): https://sre.google/sre-book/example-postmortem/</a:t>
+            </a:r>
+          </a:p>
+          <a:p xmlns:a="http://schemas.openxmlformats.org/drawingml/2006/main">
+            <a:r>
+              <a:rPr lang="en-US"/>
+              <a:t>EM Tools — executive communication updates: https://www.em-tools.io/engineering-manager-responsibilities/executive-communication</a:t>
+            </a:r>
+          </a:p>
         </p:txBody>
       </p:sp>
     </p:spTree>
@@ -532,7 +557,19 @@
           <a:p xmlns:a="http://schemas.openxmlformats.org/drawingml/2006/main">
             <a:r>
               <a:rPr lang="en-US"/>
-              <a:t>QBR classic close.</a:t>
+              <a:t>Leadership QBR scorecard → risks → asks</a:t>
+            </a:r>
+          </a:p>
+          <a:p xmlns:a="http://schemas.openxmlformats.org/drawingml/2006/main">
+            <a:r>
+              <a:rPr lang="en-US"/>
+              <a:t>SRE Book — example postmortem (impact honesty): https://sre.google/sre-book/example-postmortem/</a:t>
+            </a:r>
+          </a:p>
+          <a:p xmlns:a="http://schemas.openxmlformats.org/drawingml/2006/main">
+            <a:r>
+              <a:rPr lang="en-US"/>
+              <a:t>EM Tools — executive communication updates: https://www.em-tools.io/engineering-manager-responsibilities/executive-communication</a:t>
             </a:r>
           </a:p>
         </p:txBody>
@@ -587,7 +624,7 @@
           <a:p xmlns:a="http://schemas.openxmlformats.org/drawingml/2006/main">
             <a:r>
               <a:rPr lang="en-US"/>
-              <a:t>Same commits as kickoff.</a:t>
+              <a:t>QBR classic close.</a:t>
             </a:r>
           </a:p>
         </p:txBody>
@@ -642,7 +679,7 @@
           <a:p xmlns:a="http://schemas.openxmlformats.org/drawingml/2006/main">
             <a:r>
               <a:rPr lang="en-US"/>
-              <a:t>System fix, not blame.</a:t>
+              <a:t>Same commits as kickoff.</a:t>
             </a:r>
           </a:p>
         </p:txBody>
@@ -697,7 +734,7 @@
           <a:p xmlns:a="http://schemas.openxmlformats.org/drawingml/2006/main">
             <a:r>
               <a:rPr lang="en-US"/>
-              <a:t>Owned carry-forward.</a:t>
+              <a:t>System fix, not blame.</a:t>
             </a:r>
           </a:p>
         </p:txBody>
@@ -752,7 +789,7 @@
           <a:p xmlns:a="http://schemas.openxmlformats.org/drawingml/2006/main">
             <a:r>
               <a:rPr lang="en-US"/>
-              <a:t>Walk trade-offs; land recommendation.</a:t>
+              <a:t>Owned carry-forward.</a:t>
             </a:r>
           </a:p>
         </p:txBody>
@@ -766,6 +803,61 @@
 </file>
 
 <file path=ppt/notesSlides/notesSlide7.xml><?xml version="1.0" encoding="utf-8"?>
+<p:notes xmlns:p="http://schemas.openxmlformats.org/presentationml/2006/main">
+  <p:cSld>
+    <p:spTree>
+      <p:nvGrpSpPr>
+        <p:cNvPr id="1" name=""/>
+        <p:cNvGrpSpPr/>
+        <p:nvPr/>
+      </p:nvGrpSpPr>
+      <p:grpSpPr>
+        <a:xfrm xmlns:a="http://schemas.openxmlformats.org/drawingml/2006/main"/>
+      </p:grpSpPr>
+      <p:sp>
+        <p:nvSpPr>
+          <p:cNvPr id="2" name="Slide Image Placeholder 1"/>
+          <p:cNvSpPr/>
+          <p:nvPr>
+            <p:ph type="sldImg" idx="0"/>
+          </p:nvPr>
+        </p:nvSpPr>
+        <p:spPr/>
+        <p:txBody>
+          <a:bodyPr xmlns:a="http://schemas.openxmlformats.org/drawingml/2006/main"/>
+          <a:lstStyle xmlns:a="http://schemas.openxmlformats.org/drawingml/2006/main"/>
+          <a:p xmlns:a="http://schemas.openxmlformats.org/drawingml/2006/main"/>
+        </p:txBody>
+      </p:sp>
+      <p:sp>
+        <p:nvSpPr>
+          <p:cNvPr id="3" name="Notes Placeholder 2"/>
+          <p:cNvSpPr/>
+          <p:nvPr>
+            <p:ph type="body" idx="1"/>
+          </p:nvPr>
+        </p:nvSpPr>
+        <p:spPr/>
+        <p:txBody>
+          <a:bodyPr xmlns:a="http://schemas.openxmlformats.org/drawingml/2006/main"/>
+          <a:lstStyle xmlns:a="http://schemas.openxmlformats.org/drawingml/2006/main"/>
+          <a:p xmlns:a="http://schemas.openxmlformats.org/drawingml/2006/main">
+            <a:r>
+              <a:rPr lang="en-US"/>
+              <a:t>Walk trade-offs; land recommendation.</a:t>
+            </a:r>
+          </a:p>
+        </p:txBody>
+      </p:sp>
+    </p:spTree>
+  </p:cSld>
+  <p:clrMapOvr>
+    <a:masterClrMapping xmlns:a="http://schemas.openxmlformats.org/drawingml/2006/main"/>
+  </p:clrMapOvr>
+</p:notes>
+</file>
+
+<file path=ppt/notesSlides/notesSlide8.xml><?xml version="1.0" encoding="utf-8"?>
 <p:notes xmlns:p="http://schemas.openxmlformats.org/presentationml/2006/main">
   <p:cSld>
     <p:spTree>
@@ -1135,8 +1227,8 @@
         </p:nvSpPr>
         <p:spPr>
           <a:xfrm xmlns:a="http://schemas.openxmlformats.org/drawingml/2006/main">
-            <a:off x="504000" y="1008000"/>
-            <a:ext cx="11088000" cy="324000"/>
+            <a:off x="504000" y="936000"/>
+            <a:ext cx="11088000" cy="306000"/>
           </a:xfrm>
           <a:prstGeom xmlns:a="http://schemas.openxmlformats.org/drawingml/2006/main" prst="rect">
             <a:avLst/>
@@ -1167,8 +1259,8 @@
         </p:nvSpPr>
         <p:spPr>
           <a:xfrm xmlns:a="http://schemas.openxmlformats.org/drawingml/2006/main">
-            <a:off x="504000" y="1440000"/>
-            <a:ext cx="11088000" cy="936000"/>
+            <a:off x="504000" y="1332000"/>
+            <a:ext cx="11088000" cy="900000"/>
           </a:xfrm>
           <a:prstGeom xmlns:a="http://schemas.openxmlformats.org/drawingml/2006/main" prst="rect">
             <a:avLst/>
@@ -1179,7 +1271,7 @@
           <a:lstStyle xmlns:a="http://schemas.openxmlformats.org/drawingml/2006/main"/>
           <a:p xmlns:a="http://schemas.openxmlformats.org/drawingml/2006/main">
             <a:r>
-              <a:rPr lang="en-US" sz="3400" b="1">
+              <a:rPr lang="en-US" sz="3200" b="1">
                 <a:solidFill>
                   <a:srgbClr val="FFFFFF"/>
                 </a:solidFill>
@@ -1199,8 +1291,8 @@
         </p:nvSpPr>
         <p:spPr>
           <a:xfrm xmlns:a="http://schemas.openxmlformats.org/drawingml/2006/main">
-            <a:off x="504000" y="2520000"/>
-            <a:ext cx="11088000" cy="720000"/>
+            <a:off x="504000" y="2340000"/>
+            <a:ext cx="11088000" cy="648000"/>
           </a:xfrm>
           <a:prstGeom xmlns:a="http://schemas.openxmlformats.org/drawingml/2006/main" prst="rect">
             <a:avLst/>
@@ -1211,7 +1303,7 @@
           <a:lstStyle xmlns:a="http://schemas.openxmlformats.org/drawingml/2006/main"/>
           <a:p xmlns:a="http://schemas.openxmlformats.org/drawingml/2006/main">
             <a:r>
-              <a:rPr lang="en-US" sz="1700" b="0">
+              <a:rPr lang="en-US" sz="1600" b="0">
                 <a:solidFill>
                   <a:srgbClr val="CADCFC"/>
                 </a:solidFill>
@@ -1226,6 +1318,38 @@
       <p:sp>
         <p:nvSpPr>
           <p:cNvPr id="100003" name="TextBox 4"/>
+          <p:cNvSpPr txBox="1"/>
+          <p:nvPr/>
+        </p:nvSpPr>
+        <p:spPr>
+          <a:xfrm xmlns:a="http://schemas.openxmlformats.org/drawingml/2006/main">
+            <a:off x="504000" y="3240000"/>
+            <a:ext cx="11088000" cy="576000"/>
+          </a:xfrm>
+          <a:prstGeom xmlns:a="http://schemas.openxmlformats.org/drawingml/2006/main" prst="rect">
+            <a:avLst/>
+          </a:prstGeom>
+        </p:spPr>
+        <p:txBody>
+          <a:bodyPr xmlns:a="http://schemas.openxmlformats.org/drawingml/2006/main"/>
+          <a:lstStyle xmlns:a="http://schemas.openxmlformats.org/drawingml/2006/main"/>
+          <a:p xmlns:a="http://schemas.openxmlformats.org/drawingml/2006/main">
+            <a:r>
+              <a:rPr lang="en-US" sz="1400" b="0">
+                <a:solidFill>
+                  <a:srgbClr val="A0C4E8"/>
+                </a:solidFill>
+                <a:latin typeface="Calibri"/>
+                <a:ea typeface="Calibri"/>
+              </a:rPr>
+              <a:t>Pattern: Leadership QBR scorecard → risks → asks</a:t>
+            </a:r>
+          </a:p>
+        </p:txBody>
+      </p:sp>
+      <p:sp>
+        <p:nvSpPr>
+          <p:cNvPr id="100004" name="TextBox 5"/>
           <p:cNvSpPr txBox="1"/>
           <p:nvPr/>
         </p:nvSpPr>
@@ -1261,6 +1385,279 @@
 </file>
 
 <file path=ppt/slides/slide2.xml><?xml version="1.0" encoding="utf-8"?>
+<p:sld xmlns:p="http://schemas.openxmlformats.org/presentationml/2006/main">
+  <p:cSld name="Pattern provenance">
+    <p:bg>
+      <p:bgPr>
+        <a:solidFill xmlns:a="http://schemas.openxmlformats.org/drawingml/2006/main">
+          <a:srgbClr val="F4F7FC"/>
+        </a:solidFill>
+      </p:bgPr>
+    </p:bg>
+    <p:spTree>
+      <p:nvGrpSpPr>
+        <p:cNvPr id="1" name=""/>
+        <p:cNvGrpSpPr/>
+        <p:nvPr/>
+      </p:nvGrpSpPr>
+      <p:grpSpPr/>
+      <p:sp>
+        <p:nvSpPr>
+          <p:cNvPr id="100005" name="TextBox 1"/>
+          <p:cNvSpPr txBox="1"/>
+          <p:nvPr/>
+        </p:nvSpPr>
+        <p:spPr>
+          <a:xfrm xmlns:a="http://schemas.openxmlformats.org/drawingml/2006/main">
+            <a:off x="504000" y="270000"/>
+            <a:ext cx="11088000" cy="270000"/>
+          </a:xfrm>
+          <a:prstGeom xmlns:a="http://schemas.openxmlformats.org/drawingml/2006/main" prst="rect">
+            <a:avLst/>
+          </a:prstGeom>
+        </p:spPr>
+        <p:txBody>
+          <a:bodyPr xmlns:a="http://schemas.openxmlformats.org/drawingml/2006/main"/>
+          <a:lstStyle xmlns:a="http://schemas.openxmlformats.org/drawingml/2006/main"/>
+          <a:p xmlns:a="http://schemas.openxmlformats.org/drawingml/2006/main">
+            <a:r>
+              <a:rPr lang="en-US" sz="1100" b="1">
+                <a:solidFill>
+                  <a:srgbClr val="2B6CB0"/>
+                </a:solidFill>
+                <a:latin typeface="Calibri"/>
+                <a:ea typeface="Calibri"/>
+              </a:rPr>
+              <a:t>WHERE THIS DECK SHAPE COMES FROM</a:t>
+            </a:r>
+          </a:p>
+        </p:txBody>
+      </p:sp>
+      <p:sp>
+        <p:nvSpPr>
+          <p:cNvPr id="100006" name="TextBox 2"/>
+          <p:cNvSpPr txBox="1"/>
+          <p:nvPr/>
+        </p:nvSpPr>
+        <p:spPr>
+          <a:xfrm xmlns:a="http://schemas.openxmlformats.org/drawingml/2006/main">
+            <a:off x="504000" y="558000"/>
+            <a:ext cx="11088000" cy="612000"/>
+          </a:xfrm>
+          <a:prstGeom xmlns:a="http://schemas.openxmlformats.org/drawingml/2006/main" prst="rect">
+            <a:avLst/>
+          </a:prstGeom>
+        </p:spPr>
+        <p:txBody>
+          <a:bodyPr xmlns:a="http://schemas.openxmlformats.org/drawingml/2006/main"/>
+          <a:lstStyle xmlns:a="http://schemas.openxmlformats.org/drawingml/2006/main"/>
+          <a:p xmlns:a="http://schemas.openxmlformats.org/drawingml/2006/main">
+            <a:r>
+              <a:rPr lang="en-US" sz="2800" b="1">
+                <a:solidFill>
+                  <a:srgbClr val="1A202C"/>
+                </a:solidFill>
+                <a:latin typeface="Calibri"/>
+                <a:ea typeface="Calibri"/>
+              </a:rPr>
+              <a:t>Pattern provenance</a:t>
+            </a:r>
+          </a:p>
+        </p:txBody>
+      </p:sp>
+      <p:sp>
+        <p:nvSpPr>
+          <p:cNvPr id="100007" name="TextBox 3"/>
+          <p:cNvSpPr txBox="1"/>
+          <p:nvPr/>
+        </p:nvSpPr>
+        <p:spPr>
+          <a:xfrm xmlns:a="http://schemas.openxmlformats.org/drawingml/2006/main">
+            <a:off x="504000" y="1260000"/>
+            <a:ext cx="11088000" cy="4860000"/>
+          </a:xfrm>
+          <a:prstGeom xmlns:a="http://schemas.openxmlformats.org/drawingml/2006/main" prst="rect">
+            <a:avLst/>
+          </a:prstGeom>
+          <a:solidFill xmlns:a="http://schemas.openxmlformats.org/drawingml/2006/main">
+            <a:srgbClr val="FFFFFF"/>
+          </a:solidFill>
+        </p:spPr>
+        <p:txBody>
+          <a:bodyPr xmlns:a="http://schemas.openxmlformats.org/drawingml/2006/main"/>
+          <a:lstStyle xmlns:a="http://schemas.openxmlformats.org/drawingml/2006/main"/>
+          <a:p xmlns:a="http://schemas.openxmlformats.org/drawingml/2006/main">
+            <a:r>
+              <a:rPr lang="en-US" sz="1500" b="0">
+                <a:solidFill>
+                  <a:srgbClr val="1A202C"/>
+                </a:solidFill>
+                <a:latin typeface="Calibri"/>
+                <a:ea typeface="Calibri"/>
+              </a:rPr>
+              <a:t>Public pattern (structure only — not a confidential company deck):</a:t>
+            </a:r>
+          </a:p>
+          <a:p xmlns:a="http://schemas.openxmlformats.org/drawingml/2006/main">
+            <a:r>
+              <a:rPr lang="en-US" sz="1500" b="0">
+                <a:solidFill>
+                  <a:srgbClr val="1A202C"/>
+                </a:solidFill>
+                <a:latin typeface="Calibri"/>
+                <a:ea typeface="Calibri"/>
+              </a:rPr>
+              <a:t/>
+            </a:r>
+          </a:p>
+          <a:p xmlns:a="http://schemas.openxmlformats.org/drawingml/2006/main">
+            <a:r>
+              <a:rPr lang="en-US" sz="1500" b="0">
+                <a:solidFill>
+                  <a:srgbClr val="1A202C"/>
+                </a:solidFill>
+                <a:latin typeface="Calibri"/>
+                <a:ea typeface="Calibri"/>
+              </a:rPr>
+              <a:t>Leadership QBR scorecard → risks → asks</a:t>
+            </a:r>
+          </a:p>
+          <a:p xmlns:a="http://schemas.openxmlformats.org/drawingml/2006/main">
+            <a:r>
+              <a:rPr lang="en-US" sz="1500" b="0">
+                <a:solidFill>
+                  <a:srgbClr val="1A202C"/>
+                </a:solidFill>
+                <a:latin typeface="Calibri"/>
+                <a:ea typeface="Calibri"/>
+              </a:rPr>
+              <a:t/>
+            </a:r>
+          </a:p>
+          <a:p xmlns:a="http://schemas.openxmlformats.org/drawingml/2006/main">
+            <a:r>
+              <a:rPr lang="en-US" sz="1500" b="0">
+                <a:solidFill>
+                  <a:srgbClr val="1A202C"/>
+                </a:solidFill>
+                <a:latin typeface="Calibri"/>
+                <a:ea typeface="Calibri"/>
+              </a:rPr>
+              <a:t>• SRE Book — example postmortem (impact honesty)</a:t>
+            </a:r>
+          </a:p>
+          <a:p xmlns:a="http://schemas.openxmlformats.org/drawingml/2006/main">
+            <a:r>
+              <a:rPr lang="en-US" sz="1500" b="0">
+                <a:solidFill>
+                  <a:srgbClr val="1A202C"/>
+                </a:solidFill>
+                <a:latin typeface="Calibri"/>
+                <a:ea typeface="Calibri"/>
+              </a:rPr>
+              <a:t>  https://sre.google/sre-book/example-postmortem/</a:t>
+            </a:r>
+          </a:p>
+          <a:p xmlns:a="http://schemas.openxmlformats.org/drawingml/2006/main">
+            <a:r>
+              <a:rPr lang="en-US" sz="1500" b="0">
+                <a:solidFill>
+                  <a:srgbClr val="1A202C"/>
+                </a:solidFill>
+                <a:latin typeface="Calibri"/>
+                <a:ea typeface="Calibri"/>
+              </a:rPr>
+              <a:t>• EM Tools — executive communication updates</a:t>
+            </a:r>
+          </a:p>
+          <a:p xmlns:a="http://schemas.openxmlformats.org/drawingml/2006/main">
+            <a:r>
+              <a:rPr lang="en-US" sz="1500" b="0">
+                <a:solidFill>
+                  <a:srgbClr val="1A202C"/>
+                </a:solidFill>
+                <a:latin typeface="Calibri"/>
+                <a:ea typeface="Calibri"/>
+              </a:rPr>
+              <a:t>  https://www.em-tools.io/engineering-manager-responsibilities/executive-communication</a:t>
+            </a:r>
+          </a:p>
+          <a:p xmlns:a="http://schemas.openxmlformats.org/drawingml/2006/main">
+            <a:r>
+              <a:rPr lang="en-US" sz="1500" b="0">
+                <a:solidFill>
+                  <a:srgbClr val="1A202C"/>
+                </a:solidFill>
+                <a:latin typeface="Calibri"/>
+                <a:ea typeface="Calibri"/>
+              </a:rPr>
+              <a:t/>
+            </a:r>
+          </a:p>
+          <a:p xmlns:a="http://schemas.openxmlformats.org/drawingml/2006/main">
+            <a:r>
+              <a:rPr lang="en-US" sz="1500" b="0">
+                <a:solidFill>
+                  <a:srgbClr val="1A202C"/>
+                </a:solidFill>
+                <a:latin typeface="Calibri"/>
+                <a:ea typeface="Calibri"/>
+              </a:rPr>
+              <a:t>How to use: copy section order and decision verbs; replace with your metrics.</a:t>
+            </a:r>
+          </a:p>
+          <a:p xmlns:a="http://schemas.openxmlformats.org/drawingml/2006/main">
+            <a:r>
+              <a:rPr lang="en-US" sz="1500" b="0">
+                <a:solidFill>
+                  <a:srgbClr val="1A202C"/>
+                </a:solidFill>
+                <a:latin typeface="Calibri"/>
+                <a:ea typeface="Calibri"/>
+              </a:rPr>
+              <a:t>In-repo: skills/presentations/classic-public-cases.md</a:t>
+            </a:r>
+          </a:p>
+        </p:txBody>
+      </p:sp>
+      <p:sp>
+        <p:nvSpPr>
+          <p:cNvPr id="100008" name="TextBox 4"/>
+          <p:cNvSpPr txBox="1"/>
+          <p:nvPr/>
+        </p:nvSpPr>
+        <p:spPr>
+          <a:xfrm xmlns:a="http://schemas.openxmlformats.org/drawingml/2006/main">
+            <a:off x="504000" y="6426000"/>
+            <a:ext cx="11088000" cy="306000"/>
+          </a:xfrm>
+          <a:prstGeom xmlns:a="http://schemas.openxmlformats.org/drawingml/2006/main" prst="rect">
+            <a:avLst/>
+          </a:prstGeom>
+        </p:spPr>
+        <p:txBody>
+          <a:bodyPr xmlns:a="http://schemas.openxmlformats.org/drawingml/2006/main"/>
+          <a:lstStyle xmlns:a="http://schemas.openxmlformats.org/drawingml/2006/main"/>
+          <a:p xmlns:a="http://schemas.openxmlformats.org/drawingml/2006/main">
+            <a:r>
+              <a:rPr lang="en-US" sz="1100" b="0">
+                <a:solidFill>
+                  <a:srgbClr val="718096"/>
+                </a:solidFill>
+                <a:latin typeface="Calibri"/>
+                <a:ea typeface="Calibri"/>
+              </a:rPr>
+              <a:t>Atlas Platform  ·  Project Aurora  ·  NovaSemi  ·  2026</a:t>
+            </a:r>
+          </a:p>
+        </p:txBody>
+      </p:sp>
+    </p:spTree>
+  </p:cSld>
+</p:sld>
+</file>
+
+<file path=ppt/slides/slide3.xml><?xml version="1.0" encoding="utf-8"?>
 <p:sld xmlns:p="http://schemas.openxmlformats.org/presentationml/2006/main">
   <p:cSld name="BLUF — Q2 overall GREEN">
     <p:bg>
@@ -1279,7 +1676,7 @@
       <p:grpSpPr/>
       <p:sp>
         <p:nvSpPr>
-          <p:cNvPr id="100004" name="TextBox 1"/>
+          <p:cNvPr id="100009" name="TextBox 1"/>
           <p:cNvSpPr txBox="1"/>
           <p:nvPr/>
         </p:nvSpPr>
@@ -1311,7 +1708,7 @@
       </p:sp>
       <p:sp>
         <p:nvSpPr>
-          <p:cNvPr id="100005" name="TextBox 2"/>
+          <p:cNvPr id="100010" name="TextBox 2"/>
           <p:cNvSpPr txBox="1"/>
           <p:nvPr/>
         </p:nvSpPr>
@@ -1343,7 +1740,7 @@
       </p:sp>
       <p:sp>
         <p:nvSpPr>
-          <p:cNvPr id="100006" name="TextBox 3"/>
+          <p:cNvPr id="100011" name="TextBox 3"/>
           <p:cNvSpPr txBox="1"/>
           <p:nvPr/>
         </p:nvSpPr>
@@ -1378,7 +1775,7 @@
       </p:sp>
       <p:sp>
         <p:nvSpPr>
-          <p:cNvPr id="100007" name="TextBox 4"/>
+          <p:cNvPr id="100012" name="TextBox 4"/>
           <p:cNvSpPr txBox="1"/>
           <p:nvPr/>
         </p:nvSpPr>
@@ -1437,7 +1834,7 @@
       </p:sp>
       <p:sp>
         <p:nvSpPr>
-          <p:cNvPr id="100008" name="TextBox 5"/>
+          <p:cNvPr id="100013" name="TextBox 5"/>
           <p:cNvSpPr txBox="1"/>
           <p:nvPr/>
         </p:nvSpPr>
@@ -1472,7 +1869,7 @@
 </p:sld>
 </file>
 
-<file path=ppt/slides/slide3.xml><?xml version="1.0" encoding="utf-8"?>
+<file path=ppt/slides/slide4.xml><?xml version="1.0" encoding="utf-8"?>
 <p:sld xmlns:p="http://schemas.openxmlformats.org/presentationml/2006/main">
   <p:cSld name="Scorecard vs commits">
     <p:bg>
@@ -1491,7 +1888,7 @@
       <p:grpSpPr/>
       <p:sp>
         <p:nvSpPr>
-          <p:cNvPr id="100009" name="TextBox 1"/>
+          <p:cNvPr id="100014" name="TextBox 1"/>
           <p:cNvSpPr txBox="1"/>
           <p:nvPr/>
         </p:nvSpPr>
@@ -1523,7 +1920,7 @@
       </p:sp>
       <p:sp>
         <p:nvSpPr>
-          <p:cNvPr id="100010" name="TextBox 2"/>
+          <p:cNvPr id="100015" name="TextBox 2"/>
           <p:cNvSpPr txBox="1"/>
           <p:nvPr/>
         </p:nvSpPr>
@@ -1618,7 +2015,7 @@
       </p:sp>
       <p:sp>
         <p:nvSpPr>
-          <p:cNvPr id="100011" name="TextBox 3"/>
+          <p:cNvPr id="100016" name="TextBox 3"/>
           <p:cNvSpPr txBox="1"/>
           <p:nvPr/>
         </p:nvSpPr>
@@ -1653,7 +2050,7 @@
 </p:sld>
 </file>
 
-<file path=ppt/slides/slide4.xml><?xml version="1.0" encoding="utf-8"?>
+<file path=ppt/slides/slide5.xml><?xml version="1.0" encoding="utf-8"?>
 <p:sld xmlns:p="http://schemas.openxmlformats.org/presentationml/2006/main">
   <p:cSld name="What slipped &amp; why">
     <p:bg>
@@ -1672,7 +2069,7 @@
       <p:grpSpPr/>
       <p:sp>
         <p:nvSpPr>
-          <p:cNvPr id="100012" name="TextBox 1"/>
+          <p:cNvPr id="100017" name="TextBox 1"/>
           <p:cNvSpPr txBox="1"/>
           <p:nvPr/>
         </p:nvSpPr>
@@ -1704,7 +2101,7 @@
       </p:sp>
       <p:sp>
         <p:nvSpPr>
-          <p:cNvPr id="100013" name="TextBox 2"/>
+          <p:cNvPr id="100018" name="TextBox 2"/>
           <p:cNvSpPr txBox="1"/>
           <p:nvPr/>
         </p:nvSpPr>
@@ -1787,7 +2184,7 @@
       </p:sp>
       <p:sp>
         <p:nvSpPr>
-          <p:cNvPr id="100014" name="TextBox 3"/>
+          <p:cNvPr id="100019" name="TextBox 3"/>
           <p:cNvSpPr txBox="1"/>
           <p:nvPr/>
         </p:nvSpPr>
@@ -1822,7 +2219,7 @@
 </p:sld>
 </file>
 
-<file path=ppt/slides/slide5.xml><?xml version="1.0" encoding="utf-8"?>
+<file path=ppt/slides/slide6.xml><?xml version="1.0" encoding="utf-8"?>
 <p:sld xmlns:p="http://schemas.openxmlformats.org/presentationml/2006/main">
   <p:cSld name="Risks into next period">
     <p:bg>
@@ -1841,7 +2238,7 @@
       <p:grpSpPr/>
       <p:sp>
         <p:nvSpPr>
-          <p:cNvPr id="100015" name="TextBox 1"/>
+          <p:cNvPr id="100020" name="TextBox 1"/>
           <p:cNvSpPr txBox="1"/>
           <p:nvPr/>
         </p:nvSpPr>
@@ -1873,7 +2270,7 @@
       </p:sp>
       <p:sp>
         <p:nvSpPr>
-          <p:cNvPr id="100016" name="TextBox 2"/>
+          <p:cNvPr id="100021" name="TextBox 2"/>
           <p:cNvSpPr txBox="1"/>
           <p:nvPr/>
         </p:nvSpPr>
@@ -1956,7 +2353,7 @@
       </p:sp>
       <p:sp>
         <p:nvSpPr>
-          <p:cNvPr id="100017" name="TextBox 3"/>
+          <p:cNvPr id="100022" name="TextBox 3"/>
           <p:cNvSpPr txBox="1"/>
           <p:nvPr/>
         </p:nvSpPr>
@@ -1991,7 +2388,7 @@
 </p:sld>
 </file>
 
-<file path=ppt/slides/slide6.xml><?xml version="1.0" encoding="utf-8"?>
+<file path=ppt/slides/slide7.xml><?xml version="1.0" encoding="utf-8"?>
 <p:sld xmlns:p="http://schemas.openxmlformats.org/presentationml/2006/main">
   <p:cSld name="Options &amp; recommendation">
     <p:bg>
@@ -2010,7 +2407,7 @@
       <p:grpSpPr/>
       <p:sp>
         <p:nvSpPr>
-          <p:cNvPr id="100018" name="TextBox 1"/>
+          <p:cNvPr id="100023" name="TextBox 1"/>
           <p:cNvSpPr txBox="1"/>
           <p:nvPr/>
         </p:nvSpPr>
@@ -2042,7 +2439,7 @@
       </p:sp>
       <p:sp>
         <p:nvSpPr>
-          <p:cNvPr id="100019" name="TextBox 2"/>
+          <p:cNvPr id="100024" name="TextBox 2"/>
           <p:cNvSpPr txBox="1"/>
           <p:nvPr/>
         </p:nvSpPr>
@@ -2074,7 +2471,7 @@
       </p:sp>
       <p:graphicFrame>
         <p:nvGraphicFramePr>
-          <p:cNvPr id="100020" name="Table 1"/>
+          <p:cNvPr id="100025" name="Table 1"/>
           <p:cNvGraphicFramePr/>
           <p:nvPr/>
         </p:nvGraphicFramePr>
@@ -2381,7 +2778,7 @@
       </p:graphicFrame>
       <p:sp>
         <p:nvSpPr>
-          <p:cNvPr id="100021" name="TextBox 3"/>
+          <p:cNvPr id="100026" name="TextBox 3"/>
           <p:cNvSpPr txBox="1"/>
           <p:nvPr/>
         </p:nvSpPr>
@@ -2416,7 +2813,7 @@
 </p:sld>
 </file>
 
-<file path=ppt/slides/slide7.xml><?xml version="1.0" encoding="utf-8"?>
+<file path=ppt/slides/slide8.xml><?xml version="1.0" encoding="utf-8"?>
 <p:sld xmlns:p="http://schemas.openxmlformats.org/presentationml/2006/main">
   <p:cSld name="Decision &amp; ask">
     <p:bg>
@@ -2435,7 +2832,7 @@
       <p:grpSpPr/>
       <p:sp>
         <p:nvSpPr>
-          <p:cNvPr id="100022" name="TextBox 1"/>
+          <p:cNvPr id="100027" name="TextBox 1"/>
           <p:cNvSpPr txBox="1"/>
           <p:nvPr/>
         </p:nvSpPr>
@@ -2467,7 +2864,7 @@
       </p:sp>
       <p:sp>
         <p:nvSpPr>
-          <p:cNvPr id="100023" name="TextBox 2"/>
+          <p:cNvPr id="100028" name="TextBox 2"/>
           <p:cNvSpPr txBox="1"/>
           <p:nvPr/>
         </p:nvSpPr>
@@ -2499,7 +2896,7 @@
       </p:sp>
       <p:sp>
         <p:nvSpPr>
-          <p:cNvPr id="100024" name="TextBox 3"/>
+          <p:cNvPr id="100029" name="TextBox 3"/>
           <p:cNvSpPr txBox="1"/>
           <p:nvPr/>
         </p:nvSpPr>
@@ -2558,7 +2955,7 @@
       </p:sp>
       <p:sp>
         <p:nvSpPr>
-          <p:cNvPr id="100025" name="TextBox 4"/>
+          <p:cNvPr id="100030" name="TextBox 4"/>
           <p:cNvSpPr txBox="1"/>
           <p:nvPr/>
         </p:nvSpPr>

--- a/skills/presentations/assets/pptx/examples/09-period-end-review.pptx
+++ b/skills/presentations/assets/pptx/examples/09-period-end-review.pptx
@@ -5,17 +5,18 @@
     <p:sldMasterId xmlns:r="http://schemas.openxmlformats.org/officeDocument/2006/relationships" id="2147483648" r:id="rId1"/>
   </p:sldMasterIdLst>
   <p:notesMasterIdLst>
-    <p:notesMasterId r:id="Rce31edac39a84d13"/>
+    <p:notesMasterId r:id="Ra55a7986e38e48aa"/>
   </p:notesMasterIdLst>
   <p:sldIdLst>
-    <p:sldId id="256" r:id="Rd74d0cd4f6f14658"/>
-    <p:sldId id="257" r:id="R1990185f09a640c8"/>
-    <p:sldId id="258" r:id="Re62a985edb064ed4"/>
-    <p:sldId id="259" r:id="Rfa207d740c9f40c4"/>
-    <p:sldId id="260" r:id="Rd0d2bcaa34b14246"/>
-    <p:sldId id="261" r:id="R359ef0c2f448436c"/>
-    <p:sldId id="262" r:id="Rbccf80a58a364dc9"/>
-    <p:sldId id="263" r:id="R8371f753cf90418d"/>
+    <p:sldId id="256" r:id="R764d5d1549854f94"/>
+    <p:sldId id="257" r:id="R79eb9fa6a46c4b79"/>
+    <p:sldId id="258" r:id="R11decac73cfd4600"/>
+    <p:sldId id="259" r:id="R8cf55bde80ff4202"/>
+    <p:sldId id="260" r:id="Rb359660c8b224955"/>
+    <p:sldId id="261" r:id="R5d64bf91312c4eaf"/>
+    <p:sldId id="262" r:id="R4fd5283296ba498f"/>
+    <p:sldId id="263" r:id="R2f109608eea54f03"/>
+    <p:sldId id="264" r:id="R4b0d50cdbf8b4d4f"/>
   </p:sldIdLst>
   <p:sldSz cx="12192000" cy="6858000"/>
   <p:notesSz cx="6858000" cy="9144000"/>
@@ -624,7 +625,7 @@
           <a:p xmlns:a="http://schemas.openxmlformats.org/drawingml/2006/main">
             <a:r>
               <a:rPr lang="en-US"/>
-              <a:t>QBR classic close.</a:t>
+              <a:t>Agent/human: answer who/stakes/decision from this slide alone. Recommend=Overall GREEN with explicit carry risks; approve P1/P2 and HC path. by This QBR (~2026-06-26) + follow-up into 7/01 kickoff.</a:t>
             </a:r>
           </a:p>
         </p:txBody>
@@ -679,7 +680,7 @@
           <a:p xmlns:a="http://schemas.openxmlformats.org/drawingml/2006/main">
             <a:r>
               <a:rPr lang="en-US"/>
-              <a:t>Same commits as kickoff.</a:t>
+              <a:t>QBR classic close.</a:t>
             </a:r>
           </a:p>
         </p:txBody>
@@ -734,7 +735,7 @@
           <a:p xmlns:a="http://schemas.openxmlformats.org/drawingml/2006/main">
             <a:r>
               <a:rPr lang="en-US"/>
-              <a:t>System fix, not blame.</a:t>
+              <a:t>Same commits as kickoff.</a:t>
             </a:r>
           </a:p>
         </p:txBody>
@@ -789,7 +790,7 @@
           <a:p xmlns:a="http://schemas.openxmlformats.org/drawingml/2006/main">
             <a:r>
               <a:rPr lang="en-US"/>
-              <a:t>Owned carry-forward.</a:t>
+              <a:t>System fix, not blame.</a:t>
             </a:r>
           </a:p>
         </p:txBody>
@@ -844,7 +845,7 @@
           <a:p xmlns:a="http://schemas.openxmlformats.org/drawingml/2006/main">
             <a:r>
               <a:rPr lang="en-US"/>
-              <a:t>Walk trade-offs; land recommendation.</a:t>
+              <a:t>Owned carry-forward.</a:t>
             </a:r>
           </a:p>
         </p:txBody>
@@ -858,6 +859,61 @@
 </file>
 
 <file path=ppt/notesSlides/notesSlide8.xml><?xml version="1.0" encoding="utf-8"?>
+<p:notes xmlns:p="http://schemas.openxmlformats.org/presentationml/2006/main">
+  <p:cSld>
+    <p:spTree>
+      <p:nvGrpSpPr>
+        <p:cNvPr id="1" name=""/>
+        <p:cNvGrpSpPr/>
+        <p:nvPr/>
+      </p:nvGrpSpPr>
+      <p:grpSpPr>
+        <a:xfrm xmlns:a="http://schemas.openxmlformats.org/drawingml/2006/main"/>
+      </p:grpSpPr>
+      <p:sp>
+        <p:nvSpPr>
+          <p:cNvPr id="2" name="Slide Image Placeholder 1"/>
+          <p:cNvSpPr/>
+          <p:nvPr>
+            <p:ph type="sldImg" idx="0"/>
+          </p:nvPr>
+        </p:nvSpPr>
+        <p:spPr/>
+        <p:txBody>
+          <a:bodyPr xmlns:a="http://schemas.openxmlformats.org/drawingml/2006/main"/>
+          <a:lstStyle xmlns:a="http://schemas.openxmlformats.org/drawingml/2006/main"/>
+          <a:p xmlns:a="http://schemas.openxmlformats.org/drawingml/2006/main"/>
+        </p:txBody>
+      </p:sp>
+      <p:sp>
+        <p:nvSpPr>
+          <p:cNvPr id="3" name="Notes Placeholder 2"/>
+          <p:cNvSpPr/>
+          <p:nvPr>
+            <p:ph type="body" idx="1"/>
+          </p:nvPr>
+        </p:nvSpPr>
+        <p:spPr/>
+        <p:txBody>
+          <a:bodyPr xmlns:a="http://schemas.openxmlformats.org/drawingml/2006/main"/>
+          <a:lstStyle xmlns:a="http://schemas.openxmlformats.org/drawingml/2006/main"/>
+          <a:p xmlns:a="http://schemas.openxmlformats.org/drawingml/2006/main">
+            <a:r>
+              <a:rPr lang="en-US"/>
+              <a:t>Walk trade-offs; land recommendation.</a:t>
+            </a:r>
+          </a:p>
+        </p:txBody>
+      </p:sp>
+    </p:spTree>
+  </p:cSld>
+  <p:clrMapOvr>
+    <a:masterClrMapping xmlns:a="http://schemas.openxmlformats.org/drawingml/2006/main"/>
+  </p:clrMapOvr>
+</p:notes>
+</file>
+
+<file path=ppt/notesSlides/notesSlide9.xml><?xml version="1.0" encoding="utf-8"?>
 <p:notes xmlns:p="http://schemas.openxmlformats.org/presentationml/2006/main">
   <p:cSld>
     <p:spTree>
@@ -1659,6 +1715,387 @@
 
 <file path=ppt/slides/slide3.xml><?xml version="1.0" encoding="utf-8"?>
 <p:sld xmlns:p="http://schemas.openxmlformats.org/presentationml/2006/main">
+  <p:cSld name="Situation &amp; decision card">
+    <p:bg>
+      <p:bgPr>
+        <a:solidFill xmlns:a="http://schemas.openxmlformats.org/drawingml/2006/main">
+          <a:srgbClr val="F4F7FC"/>
+        </a:solidFill>
+      </p:bgPr>
+    </p:bg>
+    <p:spTree>
+      <p:nvGrpSpPr>
+        <p:cNvPr id="1" name=""/>
+        <p:cNvGrpSpPr/>
+        <p:nvPr/>
+      </p:nvGrpSpPr>
+      <p:grpSpPr/>
+      <p:sp>
+        <p:nvSpPr>
+          <p:cNvPr id="100009" name="TextBox 1"/>
+          <p:cNvSpPr txBox="1"/>
+          <p:nvPr/>
+        </p:nvSpPr>
+        <p:spPr>
+          <a:xfrm xmlns:a="http://schemas.openxmlformats.org/drawingml/2006/main">
+            <a:off x="504000" y="270000"/>
+            <a:ext cx="11088000" cy="270000"/>
+          </a:xfrm>
+          <a:prstGeom xmlns:a="http://schemas.openxmlformats.org/drawingml/2006/main" prst="rect">
+            <a:avLst/>
+          </a:prstGeom>
+        </p:spPr>
+        <p:txBody>
+          <a:bodyPr xmlns:a="http://schemas.openxmlformats.org/drawingml/2006/main"/>
+          <a:lstStyle xmlns:a="http://schemas.openxmlformats.org/drawingml/2006/main"/>
+          <a:p xmlns:a="http://schemas.openxmlformats.org/drawingml/2006/main">
+            <a:r>
+              <a:rPr lang="en-US" sz="1100" b="1">
+                <a:solidFill>
+                  <a:srgbClr val="2B6CB0"/>
+                </a:solidFill>
+                <a:latin typeface="Calibri"/>
+                <a:ea typeface="Calibri"/>
+              </a:rPr>
+              <a:t>READ THIS BEFORE THE DETAILS</a:t>
+            </a:r>
+          </a:p>
+        </p:txBody>
+      </p:sp>
+      <p:sp>
+        <p:nvSpPr>
+          <p:cNvPr id="100010" name="TextBox 2"/>
+          <p:cNvSpPr txBox="1"/>
+          <p:nvPr/>
+        </p:nvSpPr>
+        <p:spPr>
+          <a:xfrm xmlns:a="http://schemas.openxmlformats.org/drawingml/2006/main">
+            <a:off x="504000" y="558000"/>
+            <a:ext cx="11088000" cy="612000"/>
+          </a:xfrm>
+          <a:prstGeom xmlns:a="http://schemas.openxmlformats.org/drawingml/2006/main" prst="rect">
+            <a:avLst/>
+          </a:prstGeom>
+        </p:spPr>
+        <p:txBody>
+          <a:bodyPr xmlns:a="http://schemas.openxmlformats.org/drawingml/2006/main"/>
+          <a:lstStyle xmlns:a="http://schemas.openxmlformats.org/drawingml/2006/main"/>
+          <a:p xmlns:a="http://schemas.openxmlformats.org/drawingml/2006/main">
+            <a:r>
+              <a:rPr lang="en-US" sz="2800" b="1">
+                <a:solidFill>
+                  <a:srgbClr val="1A202C"/>
+                </a:solidFill>
+                <a:latin typeface="Calibri"/>
+                <a:ea typeface="Calibri"/>
+              </a:rPr>
+              <a:t>Situation &amp; decision card</a:t>
+            </a:r>
+          </a:p>
+        </p:txBody>
+      </p:sp>
+      <p:sp>
+        <p:nvSpPr>
+          <p:cNvPr id="100011" name="TextBox 3"/>
+          <p:cNvSpPr txBox="1"/>
+          <p:nvPr/>
+        </p:nvSpPr>
+        <p:spPr>
+          <a:xfrm xmlns:a="http://schemas.openxmlformats.org/drawingml/2006/main">
+            <a:off x="504000" y="1224000"/>
+            <a:ext cx="11088000" cy="4968000"/>
+          </a:xfrm>
+          <a:prstGeom xmlns:a="http://schemas.openxmlformats.org/drawingml/2006/main" prst="rect">
+            <a:avLst/>
+          </a:prstGeom>
+          <a:solidFill xmlns:a="http://schemas.openxmlformats.org/drawingml/2006/main">
+            <a:srgbClr val="FFFFFF"/>
+          </a:solidFill>
+        </p:spPr>
+        <p:txBody>
+          <a:bodyPr xmlns:a="http://schemas.openxmlformats.org/drawingml/2006/main"/>
+          <a:lstStyle xmlns:a="http://schemas.openxmlformats.org/drawingml/2006/main"/>
+          <a:p xmlns:a="http://schemas.openxmlformats.org/drawingml/2006/main">
+            <a:r>
+              <a:rPr lang="en-US" sz="1300" b="0">
+                <a:solidFill>
+                  <a:srgbClr val="1A202C"/>
+                </a:solidFill>
+                <a:latin typeface="Calibri"/>
+                <a:ea typeface="Calibri"/>
+              </a:rPr>
+              <a:t>Presenter: Alex Chen — EM, Atlas Q2 QBR</a:t>
+            </a:r>
+          </a:p>
+          <a:p xmlns:a="http://schemas.openxmlformats.org/drawingml/2006/main">
+            <a:r>
+              <a:rPr lang="en-US" sz="1300" b="0">
+                <a:solidFill>
+                  <a:srgbClr val="1A202C"/>
+                </a:solidFill>
+                <a:latin typeface="Calibri"/>
+                <a:ea typeface="Calibri"/>
+              </a:rPr>
+              <a:t>Decision-maker: Morgan Lee + leadership forum</a:t>
+            </a:r>
+          </a:p>
+          <a:p xmlns:a="http://schemas.openxmlformats.org/drawingml/2006/main">
+            <a:r>
+              <a:rPr lang="en-US" sz="1300" b="0">
+                <a:solidFill>
+                  <a:srgbClr val="1A202C"/>
+                </a:solidFill>
+                <a:latin typeface="Calibri"/>
+                <a:ea typeface="Calibri"/>
+              </a:rPr>
+              <a:t>Audience: VP Eng, peer EMs, program</a:t>
+            </a:r>
+          </a:p>
+          <a:p xmlns:a="http://schemas.openxmlformats.org/drawingml/2006/main">
+            <a:r>
+              <a:rPr lang="en-US" sz="1300" b="0">
+                <a:solidFill>
+                  <a:srgbClr val="1A202C"/>
+                </a:solidFill>
+                <a:latin typeface="Calibri"/>
+                <a:ea typeface="Calibri"/>
+              </a:rPr>
+              <a:t/>
+            </a:r>
+          </a:p>
+          <a:p xmlns:a="http://schemas.openxmlformats.org/drawingml/2006/main">
+            <a:r>
+              <a:rPr lang="en-US" sz="1300" b="0">
+                <a:solidFill>
+                  <a:srgbClr val="1A202C"/>
+                </a:solidFill>
+                <a:latin typeface="Calibri"/>
+                <a:ea typeface="Calibri"/>
+              </a:rPr>
+              <a:t>What just happened / context:</a:t>
+            </a:r>
+          </a:p>
+          <a:p xmlns:a="http://schemas.openxmlformats.org/drawingml/2006/main">
+            <a:r>
+              <a:rPr lang="en-US" sz="1300" b="0">
+                <a:solidFill>
+                  <a:srgbClr val="1A202C"/>
+                </a:solidFill>
+                <a:latin typeface="Calibri"/>
+                <a:ea typeface="Calibri"/>
+              </a:rPr>
+              <a:t>Q2 closed ~2026-06-26 lookback: AON B 3/20, freeze 4/10, TO 4/28, day-3 boot 5/15, sample on track 6/30. USB3 partial; unplanned ~20%; IO single-thread carried yellow.</a:t>
+            </a:r>
+          </a:p>
+          <a:p xmlns:a="http://schemas.openxmlformats.org/drawingml/2006/main">
+            <a:r>
+              <a:rPr lang="en-US" sz="1300" b="0">
+                <a:solidFill>
+                  <a:srgbClr val="1A202C"/>
+                </a:solidFill>
+                <a:latin typeface="Calibri"/>
+                <a:ea typeface="Calibri"/>
+              </a:rPr>
+              <a:t/>
+            </a:r>
+          </a:p>
+          <a:p xmlns:a="http://schemas.openxmlformats.org/drawingml/2006/main">
+            <a:r>
+              <a:rPr lang="en-US" sz="1300" b="0">
+                <a:solidFill>
+                  <a:srgbClr val="1A202C"/>
+                </a:solidFill>
+                <a:latin typeface="Calibri"/>
+                <a:ea typeface="Calibri"/>
+              </a:rPr>
+              <a:t>Stakes if we get this wrong:</a:t>
+            </a:r>
+          </a:p>
+          <a:p xmlns:a="http://schemas.openxmlformats.org/drawingml/2006/main">
+            <a:r>
+              <a:rPr lang="en-US" sz="1300" b="0">
+                <a:solidFill>
+                  <a:srgbClr val="1A202C"/>
+                </a:solidFill>
+                <a:latin typeface="Calibri"/>
+                <a:ea typeface="Calibri"/>
+              </a:rPr>
+              <a:t>If leadership only hears GREEN silicon, they may underfund Q3 hire/intake discipline and recreate unplanned overload.</a:t>
+            </a:r>
+          </a:p>
+          <a:p xmlns:a="http://schemas.openxmlformats.org/drawingml/2006/main">
+            <a:r>
+              <a:rPr lang="en-US" sz="1300" b="0">
+                <a:solidFill>
+                  <a:srgbClr val="1A202C"/>
+                </a:solidFill>
+                <a:latin typeface="Calibri"/>
+                <a:ea typeface="Calibri"/>
+              </a:rPr>
+              <a:t/>
+            </a:r>
+          </a:p>
+          <a:p xmlns:a="http://schemas.openxmlformats.org/drawingml/2006/main">
+            <a:r>
+              <a:rPr lang="en-US" sz="1300" b="0">
+                <a:solidFill>
+                  <a:srgbClr val="1A202C"/>
+                </a:solidFill>
+                <a:latin typeface="Calibri"/>
+                <a:ea typeface="Calibri"/>
+              </a:rPr>
+              <a:t>Decision needed:</a:t>
+            </a:r>
+          </a:p>
+          <a:p xmlns:a="http://schemas.openxmlformats.org/drawingml/2006/main">
+            <a:r>
+              <a:rPr lang="en-US" sz="1300" b="0">
+                <a:solidFill>
+                  <a:srgbClr val="1A202C"/>
+                </a:solidFill>
+                <a:latin typeface="Calibri"/>
+                <a:ea typeface="Calibri"/>
+              </a:rPr>
+              <a:t>Endorse next priorities P1 sample SLA + P2 revB; keep WiFi stretch; support DV hire + Q3 plan B.</a:t>
+            </a:r>
+          </a:p>
+          <a:p xmlns:a="http://schemas.openxmlformats.org/drawingml/2006/main">
+            <a:r>
+              <a:rPr lang="en-US" sz="1300" b="0">
+                <a:solidFill>
+                  <a:srgbClr val="1A202C"/>
+                </a:solidFill>
+                <a:latin typeface="Calibri"/>
+                <a:ea typeface="Calibri"/>
+              </a:rPr>
+              <a:t/>
+            </a:r>
+          </a:p>
+          <a:p xmlns:a="http://schemas.openxmlformats.org/drawingml/2006/main">
+            <a:r>
+              <a:rPr lang="en-US" sz="1300" b="0">
+                <a:solidFill>
+                  <a:srgbClr val="1A202C"/>
+                </a:solidFill>
+                <a:latin typeface="Calibri"/>
+                <a:ea typeface="Calibri"/>
+              </a:rPr>
+              <a:t>Recommendation: Overall GREEN with explicit carry risks; approve P1/P2 and HC path.</a:t>
+            </a:r>
+          </a:p>
+          <a:p xmlns:a="http://schemas.openxmlformats.org/drawingml/2006/main">
+            <a:r>
+              <a:rPr lang="en-US" sz="1300" b="0">
+                <a:solidFill>
+                  <a:srgbClr val="1A202C"/>
+                </a:solidFill>
+                <a:latin typeface="Calibri"/>
+                <a:ea typeface="Calibri"/>
+              </a:rPr>
+              <a:t>If YES: Q3 kickoff (08) has air cover; hire continues; intake rule enforced.</a:t>
+            </a:r>
+          </a:p>
+          <a:p xmlns:a="http://schemas.openxmlformats.org/drawingml/2006/main">
+            <a:r>
+              <a:rPr lang="en-US" sz="1300" b="0">
+                <a:solidFill>
+                  <a:srgbClr val="1A202C"/>
+                </a:solidFill>
+                <a:latin typeface="Calibri"/>
+                <a:ea typeface="Calibri"/>
+              </a:rPr>
+              <a:t>If NO / delay: Same single-thread risk into sample support peak.</a:t>
+            </a:r>
+          </a:p>
+          <a:p xmlns:a="http://schemas.openxmlformats.org/drawingml/2006/main">
+            <a:r>
+              <a:rPr lang="en-US" sz="1300" b="0">
+                <a:solidFill>
+                  <a:srgbClr val="1A202C"/>
+                </a:solidFill>
+                <a:latin typeface="Calibri"/>
+                <a:ea typeface="Calibri"/>
+              </a:rPr>
+              <a:t/>
+            </a:r>
+          </a:p>
+          <a:p xmlns:a="http://schemas.openxmlformats.org/drawingml/2006/main">
+            <a:r>
+              <a:rPr lang="en-US" sz="1300" b="0">
+                <a:solidFill>
+                  <a:srgbClr val="1A202C"/>
+                </a:solidFill>
+                <a:latin typeface="Calibri"/>
+                <a:ea typeface="Calibri"/>
+              </a:rPr>
+              <a:t>Decide by: This QBR (~2026-06-26) + follow-up into 7/01 kickoff</a:t>
+            </a:r>
+          </a:p>
+          <a:p xmlns:a="http://schemas.openxmlformats.org/drawingml/2006/main">
+            <a:r>
+              <a:rPr lang="en-US" sz="1300" b="0">
+                <a:solidFill>
+                  <a:srgbClr val="1A202C"/>
+                </a:solidFill>
+                <a:latin typeface="Calibri"/>
+                <a:ea typeface="Calibri"/>
+              </a:rPr>
+              <a:t>Arc prior: Full H1 arc 01→08 decisions landed or in flight</a:t>
+            </a:r>
+          </a:p>
+          <a:p xmlns:a="http://schemas.openxmlformats.org/drawingml/2006/main">
+            <a:r>
+              <a:rPr lang="en-US" sz="1300" b="0">
+                <a:solidFill>
+                  <a:srgbClr val="1A202C"/>
+                </a:solidFill>
+                <a:latin typeface="Calibri"/>
+                <a:ea typeface="Calibri"/>
+              </a:rPr>
+              <a:t>Arc next: 08 Q3 execution under endorsed commits</a:t>
+            </a:r>
+          </a:p>
+        </p:txBody>
+      </p:sp>
+      <p:sp>
+        <p:nvSpPr>
+          <p:cNvPr id="100012" name="TextBox 4"/>
+          <p:cNvSpPr txBox="1"/>
+          <p:nvPr/>
+        </p:nvSpPr>
+        <p:spPr>
+          <a:xfrm xmlns:a="http://schemas.openxmlformats.org/drawingml/2006/main">
+            <a:off x="504000" y="6426000"/>
+            <a:ext cx="11088000" cy="306000"/>
+          </a:xfrm>
+          <a:prstGeom xmlns:a="http://schemas.openxmlformats.org/drawingml/2006/main" prst="rect">
+            <a:avLst/>
+          </a:prstGeom>
+        </p:spPr>
+        <p:txBody>
+          <a:bodyPr xmlns:a="http://schemas.openxmlformats.org/drawingml/2006/main"/>
+          <a:lstStyle xmlns:a="http://schemas.openxmlformats.org/drawingml/2006/main"/>
+          <a:p xmlns:a="http://schemas.openxmlformats.org/drawingml/2006/main">
+            <a:r>
+              <a:rPr lang="en-US" sz="1100" b="0">
+                <a:solidFill>
+                  <a:srgbClr val="718096"/>
+                </a:solidFill>
+                <a:latin typeface="Calibri"/>
+                <a:ea typeface="Calibri"/>
+              </a:rPr>
+              <a:t>Atlas Platform  ·  Project Aurora  ·  NovaSemi  ·  2026</a:t>
+            </a:r>
+          </a:p>
+        </p:txBody>
+      </p:sp>
+    </p:spTree>
+  </p:cSld>
+</p:sld>
+</file>
+
+<file path=ppt/slides/slide4.xml><?xml version="1.0" encoding="utf-8"?>
+<p:sld xmlns:p="http://schemas.openxmlformats.org/presentationml/2006/main">
   <p:cSld name="BLUF — Q2 overall GREEN">
     <p:bg>
       <p:bgPr>
@@ -1676,7 +2113,7 @@
       <p:grpSpPr/>
       <p:sp>
         <p:nvSpPr>
-          <p:cNvPr id="100009" name="TextBox 1"/>
+          <p:cNvPr id="100013" name="TextBox 1"/>
           <p:cNvSpPr txBox="1"/>
           <p:nvPr/>
         </p:nvSpPr>
@@ -1708,7 +2145,7 @@
       </p:sp>
       <p:sp>
         <p:nvSpPr>
-          <p:cNvPr id="100010" name="TextBox 2"/>
+          <p:cNvPr id="100014" name="TextBox 2"/>
           <p:cNvSpPr txBox="1"/>
           <p:nvPr/>
         </p:nvSpPr>
@@ -1740,7 +2177,7 @@
       </p:sp>
       <p:sp>
         <p:nvSpPr>
-          <p:cNvPr id="100011" name="TextBox 3"/>
+          <p:cNvPr id="100015" name="TextBox 3"/>
           <p:cNvSpPr txBox="1"/>
           <p:nvPr/>
         </p:nvSpPr>
@@ -1775,7 +2212,7 @@
       </p:sp>
       <p:sp>
         <p:nvSpPr>
-          <p:cNvPr id="100012" name="TextBox 4"/>
+          <p:cNvPr id="100016" name="TextBox 4"/>
           <p:cNvSpPr txBox="1"/>
           <p:nvPr/>
         </p:nvSpPr>
@@ -1834,7 +2271,7 @@
       </p:sp>
       <p:sp>
         <p:nvSpPr>
-          <p:cNvPr id="100013" name="TextBox 5"/>
+          <p:cNvPr id="100017" name="TextBox 5"/>
           <p:cNvSpPr txBox="1"/>
           <p:nvPr/>
         </p:nvSpPr>
@@ -1869,7 +2306,7 @@
 </p:sld>
 </file>
 
-<file path=ppt/slides/slide4.xml><?xml version="1.0" encoding="utf-8"?>
+<file path=ppt/slides/slide5.xml><?xml version="1.0" encoding="utf-8"?>
 <p:sld xmlns:p="http://schemas.openxmlformats.org/presentationml/2006/main">
   <p:cSld name="Scorecard vs commits">
     <p:bg>
@@ -1888,7 +2325,7 @@
       <p:grpSpPr/>
       <p:sp>
         <p:nvSpPr>
-          <p:cNvPr id="100014" name="TextBox 1"/>
+          <p:cNvPr id="100018" name="TextBox 1"/>
           <p:cNvSpPr txBox="1"/>
           <p:nvPr/>
         </p:nvSpPr>
@@ -1920,7 +2357,7 @@
       </p:sp>
       <p:sp>
         <p:nvSpPr>
-          <p:cNvPr id="100015" name="TextBox 2"/>
+          <p:cNvPr id="100019" name="TextBox 2"/>
           <p:cNvSpPr txBox="1"/>
           <p:nvPr/>
         </p:nvSpPr>
@@ -2015,7 +2452,7 @@
       </p:sp>
       <p:sp>
         <p:nvSpPr>
-          <p:cNvPr id="100016" name="TextBox 3"/>
+          <p:cNvPr id="100020" name="TextBox 3"/>
           <p:cNvSpPr txBox="1"/>
           <p:nvPr/>
         </p:nvSpPr>
@@ -2050,7 +2487,7 @@
 </p:sld>
 </file>
 
-<file path=ppt/slides/slide5.xml><?xml version="1.0" encoding="utf-8"?>
+<file path=ppt/slides/slide6.xml><?xml version="1.0" encoding="utf-8"?>
 <p:sld xmlns:p="http://schemas.openxmlformats.org/presentationml/2006/main">
   <p:cSld name="What slipped &amp; why">
     <p:bg>
@@ -2069,7 +2506,7 @@
       <p:grpSpPr/>
       <p:sp>
         <p:nvSpPr>
-          <p:cNvPr id="100017" name="TextBox 1"/>
+          <p:cNvPr id="100021" name="TextBox 1"/>
           <p:cNvSpPr txBox="1"/>
           <p:nvPr/>
         </p:nvSpPr>
@@ -2101,7 +2538,7 @@
       </p:sp>
       <p:sp>
         <p:nvSpPr>
-          <p:cNvPr id="100018" name="TextBox 2"/>
+          <p:cNvPr id="100022" name="TextBox 2"/>
           <p:cNvSpPr txBox="1"/>
           <p:nvPr/>
         </p:nvSpPr>
@@ -2184,7 +2621,7 @@
       </p:sp>
       <p:sp>
         <p:nvSpPr>
-          <p:cNvPr id="100019" name="TextBox 3"/>
+          <p:cNvPr id="100023" name="TextBox 3"/>
           <p:cNvSpPr txBox="1"/>
           <p:nvPr/>
         </p:nvSpPr>
@@ -2219,7 +2656,7 @@
 </p:sld>
 </file>
 
-<file path=ppt/slides/slide6.xml><?xml version="1.0" encoding="utf-8"?>
+<file path=ppt/slides/slide7.xml><?xml version="1.0" encoding="utf-8"?>
 <p:sld xmlns:p="http://schemas.openxmlformats.org/presentationml/2006/main">
   <p:cSld name="Risks into next period">
     <p:bg>
@@ -2238,7 +2675,7 @@
       <p:grpSpPr/>
       <p:sp>
         <p:nvSpPr>
-          <p:cNvPr id="100020" name="TextBox 1"/>
+          <p:cNvPr id="100024" name="TextBox 1"/>
           <p:cNvSpPr txBox="1"/>
           <p:nvPr/>
         </p:nvSpPr>
@@ -2270,7 +2707,7 @@
       </p:sp>
       <p:sp>
         <p:nvSpPr>
-          <p:cNvPr id="100021" name="TextBox 2"/>
+          <p:cNvPr id="100025" name="TextBox 2"/>
           <p:cNvSpPr txBox="1"/>
           <p:nvPr/>
         </p:nvSpPr>
@@ -2353,7 +2790,7 @@
       </p:sp>
       <p:sp>
         <p:nvSpPr>
-          <p:cNvPr id="100022" name="TextBox 3"/>
+          <p:cNvPr id="100026" name="TextBox 3"/>
           <p:cNvSpPr txBox="1"/>
           <p:nvPr/>
         </p:nvSpPr>
@@ -2388,7 +2825,7 @@
 </p:sld>
 </file>
 
-<file path=ppt/slides/slide7.xml><?xml version="1.0" encoding="utf-8"?>
+<file path=ppt/slides/slide8.xml><?xml version="1.0" encoding="utf-8"?>
 <p:sld xmlns:p="http://schemas.openxmlformats.org/presentationml/2006/main">
   <p:cSld name="Options &amp; recommendation">
     <p:bg>
@@ -2407,7 +2844,7 @@
       <p:grpSpPr/>
       <p:sp>
         <p:nvSpPr>
-          <p:cNvPr id="100023" name="TextBox 1"/>
+          <p:cNvPr id="100027" name="TextBox 1"/>
           <p:cNvSpPr txBox="1"/>
           <p:nvPr/>
         </p:nvSpPr>
@@ -2439,7 +2876,7 @@
       </p:sp>
       <p:sp>
         <p:nvSpPr>
-          <p:cNvPr id="100024" name="TextBox 2"/>
+          <p:cNvPr id="100028" name="TextBox 2"/>
           <p:cNvSpPr txBox="1"/>
           <p:nvPr/>
         </p:nvSpPr>
@@ -2471,7 +2908,7 @@
       </p:sp>
       <p:graphicFrame>
         <p:nvGraphicFramePr>
-          <p:cNvPr id="100025" name="Table 1"/>
+          <p:cNvPr id="100029" name="Table 1"/>
           <p:cNvGraphicFramePr/>
           <p:nvPr/>
         </p:nvGraphicFramePr>
@@ -2778,7 +3215,7 @@
       </p:graphicFrame>
       <p:sp>
         <p:nvSpPr>
-          <p:cNvPr id="100026" name="TextBox 3"/>
+          <p:cNvPr id="100030" name="TextBox 3"/>
           <p:cNvSpPr txBox="1"/>
           <p:nvPr/>
         </p:nvSpPr>
@@ -2813,7 +3250,7 @@
 </p:sld>
 </file>
 
-<file path=ppt/slides/slide8.xml><?xml version="1.0" encoding="utf-8"?>
+<file path=ppt/slides/slide9.xml><?xml version="1.0" encoding="utf-8"?>
 <p:sld xmlns:p="http://schemas.openxmlformats.org/presentationml/2006/main">
   <p:cSld name="Decision &amp; ask">
     <p:bg>
@@ -2832,7 +3269,7 @@
       <p:grpSpPr/>
       <p:sp>
         <p:nvSpPr>
-          <p:cNvPr id="100027" name="TextBox 1"/>
+          <p:cNvPr id="100031" name="TextBox 1"/>
           <p:cNvSpPr txBox="1"/>
           <p:nvPr/>
         </p:nvSpPr>
@@ -2864,7 +3301,7 @@
       </p:sp>
       <p:sp>
         <p:nvSpPr>
-          <p:cNvPr id="100028" name="TextBox 2"/>
+          <p:cNvPr id="100032" name="TextBox 2"/>
           <p:cNvSpPr txBox="1"/>
           <p:nvPr/>
         </p:nvSpPr>
@@ -2896,7 +3333,7 @@
       </p:sp>
       <p:sp>
         <p:nvSpPr>
-          <p:cNvPr id="100029" name="TextBox 3"/>
+          <p:cNvPr id="100033" name="TextBox 3"/>
           <p:cNvSpPr txBox="1"/>
           <p:nvPr/>
         </p:nvSpPr>
@@ -2955,7 +3392,7 @@
       </p:sp>
       <p:sp>
         <p:nvSpPr>
-          <p:cNvPr id="100030" name="TextBox 4"/>
+          <p:cNvPr id="100034" name="TextBox 4"/>
           <p:cNvSpPr txBox="1"/>
           <p:nvPr/>
         </p:nvSpPr>

--- a/skills/presentations/assets/pptx/examples/09-period-end-review.pptx
+++ b/skills/presentations/assets/pptx/examples/09-period-end-review.pptx
@@ -5,18 +5,18 @@
     <p:sldMasterId xmlns:r="http://schemas.openxmlformats.org/officeDocument/2006/relationships" id="2147483648" r:id="rId1"/>
   </p:sldMasterIdLst>
   <p:notesMasterIdLst>
-    <p:notesMasterId r:id="Ra55a7986e38e48aa"/>
+    <p:notesMasterId r:id="R9461ff9d998e4e62"/>
   </p:notesMasterIdLst>
   <p:sldIdLst>
-    <p:sldId id="256" r:id="R764d5d1549854f94"/>
-    <p:sldId id="257" r:id="R79eb9fa6a46c4b79"/>
-    <p:sldId id="258" r:id="R11decac73cfd4600"/>
-    <p:sldId id="259" r:id="R8cf55bde80ff4202"/>
-    <p:sldId id="260" r:id="Rb359660c8b224955"/>
-    <p:sldId id="261" r:id="R5d64bf91312c4eaf"/>
-    <p:sldId id="262" r:id="R4fd5283296ba498f"/>
-    <p:sldId id="263" r:id="R2f109608eea54f03"/>
-    <p:sldId id="264" r:id="R4b0d50cdbf8b4d4f"/>
+    <p:sldId id="256" r:id="Rc38c62ffc6b8455b"/>
+    <p:sldId id="257" r:id="R645ee887409d4c98"/>
+    <p:sldId id="258" r:id="Re49ac7c29f894b57"/>
+    <p:sldId id="259" r:id="Rc87eafa5d2b544f4"/>
+    <p:sldId id="260" r:id="Re8f9d2d62acc482f"/>
+    <p:sldId id="261" r:id="R3c1a78587f264be0"/>
+    <p:sldId id="262" r:id="R951f1e09d84b4b8f"/>
+    <p:sldId id="263" r:id="R930444cb5af64be2"/>
+    <p:sldId id="264" r:id="R89f55c893918413e"/>
   </p:sldIdLst>
   <p:sldSz cx="12192000" cy="6858000"/>
   <p:notesSz cx="6858000" cy="9144000"/>
@@ -2040,7 +2040,7 @@
                 <a:latin typeface="Calibri"/>
                 <a:ea typeface="Calibri"/>
               </a:rPr>
-              <a:t>Arc prior: Full H1 arc 01→08 decisions landed or in flight</a:t>
+              <a:t>Arc prior: H1 arc so far: 01→02→03/06→04→05→07 (not 08 — Q3 kickoff is after this QBR)</a:t>
             </a:r>
           </a:p>
           <a:p xmlns:a="http://schemas.openxmlformats.org/drawingml/2006/main">
@@ -2052,7 +2052,7 @@
                 <a:latin typeface="Calibri"/>
                 <a:ea typeface="Calibri"/>
               </a:rPr>
-              <a:t>Arc next: 08 Q3 execution under endorsed commits</a:t>
+              <a:t>Arc next: 08 Q3 kickoff 7/01 under endorsed commits</a:t>
             </a:r>
           </a:p>
         </p:txBody>

--- a/skills/presentations/assets/pptx/examples/09-period-end-review.pptx
+++ b/skills/presentations/assets/pptx/examples/09-period-end-review.pptx
@@ -5,18 +5,18 @@
     <p:sldMasterId xmlns:r="http://schemas.openxmlformats.org/officeDocument/2006/relationships" id="2147483648" r:id="rId1"/>
   </p:sldMasterIdLst>
   <p:notesMasterIdLst>
-    <p:notesMasterId r:id="R9461ff9d998e4e62"/>
+    <p:notesMasterId r:id="R77fad6edc5ff4d3f"/>
   </p:notesMasterIdLst>
   <p:sldIdLst>
-    <p:sldId id="256" r:id="Rc38c62ffc6b8455b"/>
-    <p:sldId id="257" r:id="R645ee887409d4c98"/>
-    <p:sldId id="258" r:id="Re49ac7c29f894b57"/>
-    <p:sldId id="259" r:id="Rc87eafa5d2b544f4"/>
-    <p:sldId id="260" r:id="Re8f9d2d62acc482f"/>
-    <p:sldId id="261" r:id="R3c1a78587f264be0"/>
-    <p:sldId id="262" r:id="R951f1e09d84b4b8f"/>
-    <p:sldId id="263" r:id="R930444cb5af64be2"/>
-    <p:sldId id="264" r:id="R89f55c893918413e"/>
+    <p:sldId id="256" r:id="R92752427105f4b50"/>
+    <p:sldId id="257" r:id="R5c8735456b244141"/>
+    <p:sldId id="258" r:id="R31b183c1ffe346af"/>
+    <p:sldId id="259" r:id="R1afcb8d8766c4265"/>
+    <p:sldId id="260" r:id="R9b61c0efa3234267"/>
+    <p:sldId id="261" r:id="R174774e199f3463d"/>
+    <p:sldId id="262" r:id="R11ed1c0e06e24c12"/>
+    <p:sldId id="263" r:id="R7c06dccc0f174bbc"/>
+    <p:sldId id="264" r:id="R39778ced27a6441c"/>
   </p:sldIdLst>
   <p:sldSz cx="12192000" cy="6858000"/>
   <p:notesSz cx="6858000" cy="9144000"/>
@@ -1671,7 +1671,19 @@
                 <a:latin typeface="Calibri"/>
                 <a:ea typeface="Calibri"/>
               </a:rPr>
-              <a:t>In-repo: skills/presentations/classic-public-cases.md</a:t>
+              <a:t>CONTENT TEMPLATE ONLY — do not copy visual design (colors, margins, fonts) as a brand system.</a:t>
+            </a:r>
+          </a:p>
+          <a:p xmlns:a="http://schemas.openxmlformats.org/drawingml/2006/main">
+            <a:r>
+              <a:rPr lang="en-US" sz="1500" b="0">
+                <a:solidFill>
+                  <a:srgbClr val="1A202C"/>
+                </a:solidFill>
+                <a:latin typeface="Calibri"/>
+                <a:ea typeface="Calibri"/>
+              </a:rPr>
+              <a:t>In-repo: skills/presentations/classic-public-cases.md · assets/README.md (agent notice)</a:t>
             </a:r>
           </a:p>
         </p:txBody>
